--- a/site/clases/parte-7-etica-fairness-privacidad/223-tipos-de-sesgo-algoritmico-y-origenes/clase-223-tipos-de-sesgo-algoritmico-y-origenes-presentacion.pptx
+++ b/site/clases/parte-7-etica-fairness-privacidad/223-tipos-de-sesgo-algoritmico-y-origenes/clase-223-tipos-de-sesgo-algoritmico-y-origenes-presentacion.pptx
@@ -3272,7 +3272,7 @@
                 </a:solidFill>
                 <a:latin typeface="Segoe UI"/>
               </a:rPr>
-              <a:t>Parte: 7 — Ética, Fairness y Privacidad · Fuente: Suresh &amp; Guttag, A Framework for Understanding Sources of Harm throughout the ML Life Cycle (EAAMO 2021) + Barocas, Hardt, Narayanan, Fairness and Machine Learning (2023), caps. 1-2.  Duración estimada: 75 min.</a:t>
+              <a:t>Parte: 7 — Ética, Fairness y Privacidad · Fuente: Suresh &amp; Guttag, A Framework for Understanding Sources of Harm throughout the ML Life Cycle (EAAMO 2021) + Barocas, Hardt, Narayanan, Fairness and Machine Learning (2023), caps. 1-2.  Duración estimada: 75 min. · Nivel: Intermedio-Avanzado</a:t>
             </a:r>
           </a:p>
         </p:txBody>
@@ -3581,7 +3581,7 @@
                 </a:solidFill>
                 <a:latin typeface="Segoe UI"/>
               </a:rPr>
-              <a:t>Parte: 7 — Ética, Fairness y Privacidad · Fuente: Suresh &amp; Guttag, A Framework for Understanding Sources of Harm throughout the ML Life Cycle (EAAMO 2021) + Barocas, Hardt, Narayanan, Fairness and Machine Learning (2023), caps. 1-2.  Duración estimada: 75 min.</a:t>
+              <a:t>Parte: 7 — Ética, Fairness y Privacidad · Fuente: Suresh &amp; Guttag, A Framework for Understanding Sources of Harm throughout the ML Life Cycle (EAAMO 2021) + Barocas, Hardt, Narayanan, Fairness and Machine Learning (2023), caps. 1-2.  Duración estimada: 75 min. · Nivel: Intermedio-Avanzado</a:t>
             </a:r>
           </a:p>
         </p:txBody>
